--- a/ppt_output/1.3_大模型文本分词与向量化.pptx
+++ b/ppt_output/1.3_大模型文本分词与向量化.pptx
@@ -16055,7 +16055,49 @@
                 <a:latin typeface="Arial" panose="020B0604020202020204" pitchFamily="34" charset="0"/>
                 <a:cs typeface="Arial" panose="020B0604020202020204" pitchFamily="34" charset="0"/>
               </a:rPr>
-              <a:t>本任务重点介绍了不同分词器的工作原理与应用场景，并通过实践验证了它们的表现。此外，还详细解析了</a:t>
+              <a:t>本任务介绍</a:t>
+            </a:r>
+            <a:r>
+              <a:rPr lang="en-US" altLang="zh-CN" dirty="0">
+                <a:latin typeface="Arial" panose="020B0604020202020204" pitchFamily="34" charset="0"/>
+                <a:cs typeface="Arial" panose="020B0604020202020204" pitchFamily="34" charset="0"/>
+              </a:rPr>
+              <a:t>jieba</a:t>
+            </a:r>
+            <a:r>
+              <a:rPr lang="zh-CN" altLang="en-US" dirty="0">
+                <a:latin typeface="Arial" panose="020B0604020202020204" pitchFamily="34" charset="0"/>
+                <a:cs typeface="Arial" panose="020B0604020202020204" pitchFamily="34" charset="0"/>
+              </a:rPr>
+              <a:t>、</a:t>
+            </a:r>
+            <a:r>
+              <a:rPr lang="en-US" altLang="zh-CN" dirty="0">
+                <a:latin typeface="Arial" panose="020B0604020202020204" pitchFamily="34" charset="0"/>
+                <a:cs typeface="Arial" panose="020B0604020202020204" pitchFamily="34" charset="0"/>
+              </a:rPr>
+              <a:t>BERT</a:t>
+            </a:r>
+            <a:r>
+              <a:rPr lang="zh-CN" altLang="en-US" dirty="0">
+                <a:latin typeface="Arial" panose="020B0604020202020204" pitchFamily="34" charset="0"/>
+                <a:cs typeface="Arial" panose="020B0604020202020204" pitchFamily="34" charset="0"/>
+              </a:rPr>
+              <a:t>、</a:t>
+            </a:r>
+            <a:r>
+              <a:rPr lang="en-US" altLang="zh-CN" dirty="0">
+                <a:latin typeface="Arial" panose="020B0604020202020204" pitchFamily="34" charset="0"/>
+                <a:cs typeface="Arial" panose="020B0604020202020204" pitchFamily="34" charset="0"/>
+              </a:rPr>
+              <a:t>Qwen</a:t>
+            </a:r>
+            <a:r>
+              <a:rPr lang="zh-CN" altLang="en-US" dirty="0">
+                <a:latin typeface="Arial" panose="020B0604020202020204" pitchFamily="34" charset="0"/>
+                <a:cs typeface="Arial" panose="020B0604020202020204" pitchFamily="34" charset="0"/>
+              </a:rPr>
+              <a:t>分词器原理与应用，验证表现。解析</a:t>
             </a:r>
             <a:r>
               <a:rPr lang="en-US" altLang="zh-CN" dirty="0">
@@ -16069,7 +16111,7 @@
                 <a:latin typeface="Arial" panose="020B0604020202020204" pitchFamily="34" charset="0"/>
                 <a:cs typeface="Arial" panose="020B0604020202020204" pitchFamily="34" charset="0"/>
               </a:rPr>
-              <a:t>模型中的词嵌入与位置编码机制，展示了如何通过可视化技术分析其分布规律。</a:t>
+              <a:t>词嵌入与位置编码机制，利用可视化技术分析分布规律，掌握分词技术，理解模型输入构造，为后续应用奠定基础。</a:t>
             </a:r>
             <a:endParaRPr lang="zh-CN" altLang="en-US" dirty="0">
               <a:latin typeface="Arial" panose="020B0604020202020204" pitchFamily="34" charset="0"/>
@@ -16652,7 +16694,7 @@
               <a:rPr lang="zh-CN" sz="2000" dirty="0">
                 <a:latin typeface="Arial" panose="020B0604020202020204" pitchFamily="34" charset="0"/>
               </a:rPr>
-              <a:t>分词器原理与应用场景</a:t>
+              <a:t>掌握三种分词器原理</a:t>
             </a:r>
             <a:endParaRPr lang="zh-CN" sz="2000" dirty="0">
               <a:latin typeface="Arial" panose="020B0604020202020204" pitchFamily="34" charset="0"/>
@@ -16693,7 +16735,7 @@
                 <a:latin typeface="Arial" panose="020B0604020202020204" pitchFamily="34" charset="0"/>
                 <a:sym typeface="+mn-ea"/>
               </a:rPr>
-              <a:t>词嵌入可视化实践</a:t>
+              <a:t>不同分词器在特定领域词汇切分的表现分析</a:t>
             </a:r>
             <a:endParaRPr lang="zh-CN" sz="2000" dirty="0">
               <a:latin typeface="Arial" panose="020B0604020202020204" pitchFamily="34" charset="0"/>
@@ -16734,7 +16776,7 @@
               <a:rPr lang="zh-CN" sz="2000" dirty="0">
                 <a:latin typeface="Arial" panose="020B0604020202020204" pitchFamily="34" charset="0"/>
               </a:rPr>
-              <a:t>词嵌入与位置编码机制</a:t>
+              <a:t>理解词嵌入与位置编码的核心机制</a:t>
             </a:r>
             <a:endParaRPr lang="zh-CN" sz="2000" dirty="0">
               <a:latin typeface="Arial" panose="020B0604020202020204" pitchFamily="34" charset="0"/>
@@ -16771,7 +16813,14 @@
               <a:buChar char="Ø"/>
             </a:pPr>
             <a:r>
-              <a:rPr lang="en-US" sz="2000" dirty="0">
+              <a:rPr lang="zh-CN" sz="2000" dirty="0">
+                <a:latin typeface="Arial" panose="020B0604020202020204" pitchFamily="34" charset="0"/>
+                <a:cs typeface="Arial" panose="020B0604020202020204" pitchFamily="34" charset="0"/>
+              </a:rPr>
+              <a:t>学会使用</a:t>
+            </a:r>
+            <a:r>
+              <a:rPr lang="en-US" altLang="zh-CN" sz="2000" dirty="0">
                 <a:latin typeface="Arial" panose="020B0604020202020204" pitchFamily="34" charset="0"/>
                 <a:cs typeface="Arial" panose="020B0604020202020204" pitchFamily="34" charset="0"/>
               </a:rPr>
@@ -16782,7 +16831,7 @@
                 <a:latin typeface="Arial" panose="020B0604020202020204" pitchFamily="34" charset="0"/>
                 <a:cs typeface="Arial" panose="020B0604020202020204" pitchFamily="34" charset="0"/>
               </a:rPr>
-              <a:t>可视化分析技术</a:t>
+              <a:t>降维进行词嵌入可视化分析</a:t>
             </a:r>
             <a:endParaRPr lang="zh-CN" altLang="en-US" sz="2000" dirty="0">
               <a:latin typeface="Arial" panose="020B0604020202020204" pitchFamily="34" charset="0"/>
@@ -16820,24 +16869,14 @@
               <a:buChar char="Ø"/>
             </a:pPr>
             <a:r>
-              <a:rPr lang="en-US" sz="2000" dirty="0">
+              <a:rPr lang="zh-CN" sz="2000" dirty="0">
                 <a:latin typeface="Arial" panose="020B0604020202020204" pitchFamily="34" charset="0"/>
-                <a:cs typeface="Arial" panose="020B0604020202020204" pitchFamily="34" charset="0"/>
                 <a:sym typeface="+mn-ea"/>
               </a:rPr>
-              <a:t>Transformer</a:t>
+              <a:t>词嵌入向量与位置编码的原理理解</a:t>
             </a:r>
-            <a:r>
-              <a:rPr lang="zh-CN" altLang="en-US" sz="2000" dirty="0">
-                <a:latin typeface="Arial" panose="020B0604020202020204" pitchFamily="34" charset="0"/>
-                <a:cs typeface="Arial" panose="020B0604020202020204" pitchFamily="34" charset="0"/>
-                <a:sym typeface="+mn-ea"/>
-              </a:rPr>
-              <a:t>输入构造</a:t>
-            </a:r>
-            <a:endParaRPr lang="zh-CN" altLang="en-US" sz="2000" dirty="0">
+            <a:endParaRPr lang="zh-CN" sz="2000" dirty="0">
               <a:latin typeface="Arial" panose="020B0604020202020204" pitchFamily="34" charset="0"/>
-              <a:cs typeface="Arial" panose="020B0604020202020204" pitchFamily="34" charset="0"/>
               <a:sym typeface="+mn-ea"/>
             </a:endParaRPr>
           </a:p>
@@ -16871,7 +16910,23 @@
               <a:buFont typeface="Wingdings" panose="05000000000000000000" pitchFamily="2" charset="2"/>
               <a:buChar char="Ø"/>
             </a:pPr>
-            <a:endParaRPr lang="en-US" sz="2000" dirty="0">
+            <a:r>
+              <a:rPr lang="en-US" sz="2000" dirty="0">
+                <a:latin typeface="Arial" panose="020B0604020202020204" pitchFamily="34" charset="0"/>
+                <a:cs typeface="Arial" panose="020B0604020202020204" pitchFamily="34" charset="0"/>
+                <a:sym typeface="+mn-ea"/>
+              </a:rPr>
+              <a:t>Transformer</a:t>
+            </a:r>
+            <a:r>
+              <a:rPr lang="zh-CN" altLang="en-US" sz="2000" dirty="0">
+                <a:latin typeface="Arial" panose="020B0604020202020204" pitchFamily="34" charset="0"/>
+                <a:cs typeface="Arial" panose="020B0604020202020204" pitchFamily="34" charset="0"/>
+                <a:sym typeface="+mn-ea"/>
+              </a:rPr>
+              <a:t>输入表示构建</a:t>
+            </a:r>
+            <a:endParaRPr lang="zh-CN" altLang="en-US" sz="2000" dirty="0">
               <a:latin typeface="Arial" panose="020B0604020202020204" pitchFamily="34" charset="0"/>
               <a:cs typeface="Arial" panose="020B0604020202020204" pitchFamily="34" charset="0"/>
               <a:sym typeface="+mn-ea"/>
@@ -18659,7 +18714,7 @@
                 <a:cs typeface="微软雅黑" panose="020B0503020204020204" pitchFamily="34" charset="-122"/>
                 <a:sym typeface="+mn-ea"/>
               </a:rPr>
-              <a:t>对一段英文文本进行分词，观察其如何处理长词和复合词；实现词嵌入的</a:t>
+              <a:t>对一段英文文本进行分词，观察其如何处理长词和复合词。实现词嵌入的</a:t>
             </a:r>
             <a:r>
               <a:rPr lang="en-US" altLang="zh-CN" sz="2000" dirty="0">
@@ -18876,16 +18931,7 @@
               <a:buSzPct val="25000"/>
             </a:pPr>
             <a:r>
-              <a:rPr lang="zh-CN" sz="2000" dirty="0">
-                <a:latin typeface="微软雅黑" panose="020B0503020204020204" pitchFamily="34" charset="-122"/>
-                <a:ea typeface="微软雅黑" panose="020B0503020204020204" pitchFamily="34" charset="-122"/>
-                <a:cs typeface="微软雅黑" panose="020B0503020204020204" pitchFamily="34" charset="-122"/>
-                <a:sym typeface="+mn-ea"/>
-              </a:rPr>
-              <a:t>技能实践需先完成开发环境配置，掌握</a:t>
-            </a:r>
-            <a:r>
-              <a:rPr lang="en-US" altLang="zh-CN" sz="2000" dirty="0">
+              <a:rPr lang="en-US" sz="2000" dirty="0">
                 <a:latin typeface="微软雅黑" panose="020B0503020204020204" pitchFamily="34" charset="-122"/>
                 <a:ea typeface="微软雅黑" panose="020B0503020204020204" pitchFamily="34" charset="-122"/>
                 <a:cs typeface="微软雅黑" panose="020B0503020204020204" pitchFamily="34" charset="-122"/>
@@ -18900,7 +18946,7 @@
                 <a:cs typeface="微软雅黑" panose="020B0503020204020204" pitchFamily="34" charset="-122"/>
                 <a:sym typeface="+mn-ea"/>
               </a:rPr>
-              <a:t>的子词分词原理，通过可视化技术直观理解词嵌入的语义分布规律，实践</a:t>
+              <a:t>处理英文时先将文本转为小写，根据词汇表进行子词划分。词嵌入</a:t>
             </a:r>
             <a:r>
               <a:rPr lang="en-US" altLang="zh-CN" sz="2000" dirty="0">
@@ -18909,7 +18955,7 @@
                 <a:cs typeface="微软雅黑" panose="020B0503020204020204" pitchFamily="34" charset="-122"/>
                 <a:sym typeface="+mn-ea"/>
               </a:rPr>
-              <a:t>Transformer</a:t>
+              <a:t>PCA</a:t>
             </a:r>
             <a:r>
               <a:rPr lang="zh-CN" altLang="en-US" sz="2000" dirty="0">
@@ -18918,7 +18964,25 @@
                 <a:cs typeface="微软雅黑" panose="020B0503020204020204" pitchFamily="34" charset="-122"/>
                 <a:sym typeface="+mn-ea"/>
               </a:rPr>
-              <a:t>模型输入构造方法。</a:t>
+              <a:t>降维可视化需获取预训练模型词向量，选取目标词汇后使用</a:t>
+            </a:r>
+            <a:r>
+              <a:rPr lang="en-US" altLang="zh-CN" sz="2000" dirty="0">
+                <a:latin typeface="微软雅黑" panose="020B0503020204020204" pitchFamily="34" charset="-122"/>
+                <a:ea typeface="微软雅黑" panose="020B0503020204020204" pitchFamily="34" charset="-122"/>
+                <a:cs typeface="微软雅黑" panose="020B0503020204020204" pitchFamily="34" charset="-122"/>
+                <a:sym typeface="+mn-ea"/>
+              </a:rPr>
+              <a:t>PCA</a:t>
+            </a:r>
+            <a:r>
+              <a:rPr lang="zh-CN" altLang="en-US" sz="2000" dirty="0">
+                <a:latin typeface="微软雅黑" panose="020B0503020204020204" pitchFamily="34" charset="-122"/>
+                <a:ea typeface="微软雅黑" panose="020B0503020204020204" pitchFamily="34" charset="-122"/>
+                <a:cs typeface="微软雅黑" panose="020B0503020204020204" pitchFamily="34" charset="-122"/>
+                <a:sym typeface="+mn-ea"/>
+              </a:rPr>
+              <a:t>投影到二维空间，通过散点图展示词汇分布，语义相似词汇在空间中距离更近。</a:t>
             </a:r>
             <a:endParaRPr lang="zh-CN" altLang="en-US" sz="2000" dirty="0">
               <a:latin typeface="微软雅黑" panose="020B0503020204020204" pitchFamily="34" charset="-122"/>
@@ -20103,7 +20167,7 @@
                 <a:cs typeface="微软雅黑" panose="020B0503020204020204" pitchFamily="34" charset="-122"/>
                 <a:sym typeface="+mn-ea"/>
               </a:rPr>
-              <a:t>以《山海经》中神兽白泽为引，阐述传统机器翻译的局限性与</a:t>
+              <a:t>以《山海经》神兽白泽为引，阐述让机器理解中文语义的挑战：从传统机器翻译的词不达意，到</a:t>
             </a:r>
             <a:r>
               <a:rPr lang="en-US" altLang="zh-CN" dirty="0">
@@ -20121,7 +20185,7 @@
                 <a:cs typeface="微软雅黑" panose="020B0503020204020204" pitchFamily="34" charset="-122"/>
                 <a:sym typeface="+mn-ea"/>
               </a:rPr>
-              <a:t>架构的突破。注意力机制使模型能通览全文、把握上下文关联。通过中文分词与词嵌入技术，将汉字映射至高维向量空间，实现语义理解。指令数据的构造赋予模型认知能力，使其不仅能复述更能理解指令、举一反三。</a:t>
+              <a:t>通过注意力机制实现上下文关联；再到大模型依赖高质量中文数据集进行分词与向量化，将汉字映射至高维向量空间，实现语义理解；最终通过指令数据对齐训练，赋予模型听懂指令、举一反三的能力。</a:t>
             </a:r>
             <a:endParaRPr lang="zh-CN" altLang="en-US" dirty="0">
               <a:latin typeface="微软雅黑" panose="020B0503020204020204" pitchFamily="34" charset="-122"/>
@@ -20193,39 +20257,7 @@
                 <a:ea typeface="微软雅黑" panose="020B0503020204020204" pitchFamily="34" charset="-122"/>
                 <a:cs typeface="微软雅黑" panose="020B0503020204020204" pitchFamily="34" charset="-122"/>
               </a:rPr>
-              <a:t>机器如何真正理解</a:t>
-            </a:r>
-            <a:r>
-              <a:rPr lang="en-US" altLang="zh-CN" sz="2000" dirty="0">
-                <a:latin typeface="微软雅黑" panose="020B0503020204020204" pitchFamily="34" charset="-122"/>
-                <a:ea typeface="微软雅黑" panose="020B0503020204020204" pitchFamily="34" charset="-122"/>
-                <a:cs typeface="微软雅黑" panose="020B0503020204020204" pitchFamily="34" charset="-122"/>
-              </a:rPr>
-              <a:t>“</a:t>
-            </a:r>
-            <a:r>
-              <a:rPr lang="zh-CN" altLang="en-US" sz="2000" dirty="0">
-                <a:latin typeface="微软雅黑" panose="020B0503020204020204" pitchFamily="34" charset="-122"/>
-                <a:ea typeface="微软雅黑" panose="020B0503020204020204" pitchFamily="34" charset="-122"/>
-                <a:cs typeface="微软雅黑" panose="020B0503020204020204" pitchFamily="34" charset="-122"/>
-              </a:rPr>
-              <a:t>白泽</a:t>
-            </a:r>
-            <a:r>
-              <a:rPr lang="en-US" altLang="zh-CN" sz="2000" dirty="0">
-                <a:latin typeface="微软雅黑" panose="020B0503020204020204" pitchFamily="34" charset="-122"/>
-                <a:ea typeface="微软雅黑" panose="020B0503020204020204" pitchFamily="34" charset="-122"/>
-                <a:cs typeface="微软雅黑" panose="020B0503020204020204" pitchFamily="34" charset="-122"/>
-              </a:rPr>
-              <a:t>”</a:t>
-            </a:r>
-            <a:r>
-              <a:rPr lang="zh-CN" altLang="en-US" sz="2000" dirty="0">
-                <a:latin typeface="微软雅黑" panose="020B0503020204020204" pitchFamily="34" charset="-122"/>
-                <a:ea typeface="微软雅黑" panose="020B0503020204020204" pitchFamily="34" charset="-122"/>
-                <a:cs typeface="微软雅黑" panose="020B0503020204020204" pitchFamily="34" charset="-122"/>
-              </a:rPr>
-              <a:t>这类复杂概念？</a:t>
+              <a:t>计算机如何将无意义字符编码转化为可理解的语义？</a:t>
             </a:r>
             <a:r>
               <a:rPr lang="en-US" altLang="zh-CN" sz="2000" dirty="0">
@@ -20242,7 +20274,7 @@
                 <a:ea typeface="微软雅黑" panose="020B0503020204020204" pitchFamily="34" charset="-122"/>
                 <a:cs typeface="微软雅黑" panose="020B0503020204020204" pitchFamily="34" charset="-122"/>
               </a:rPr>
-              <a:t>如何超越传统逐字翻译的局限？</a:t>
+              <a:t>如何通过注意力机制实现跨句关联？</a:t>
             </a:r>
             <a:r>
               <a:rPr lang="en-US" altLang="zh-CN" sz="2000" dirty="0">
@@ -20259,7 +20291,7 @@
                 <a:ea typeface="微软雅黑" panose="020B0503020204020204" pitchFamily="34" charset="-122"/>
                 <a:cs typeface="微软雅黑" panose="020B0503020204020204" pitchFamily="34" charset="-122"/>
               </a:rPr>
-              <a:t>中文分词与向量化如何实现语义关联？</a:t>
+              <a:t>中文大模型的认知深度取决于哪些关键因素？</a:t>
             </a:r>
             <a:endParaRPr lang="zh-CN" altLang="en-US" sz="2000" dirty="0">
               <a:latin typeface="微软雅黑" panose="020B0503020204020204" pitchFamily="34" charset="-122"/>
@@ -22726,7 +22758,23 @@
                 <a:ea typeface="微软雅黑" panose="020B0503020204020204" pitchFamily="34" charset="-122"/>
                 <a:cs typeface="微软雅黑" panose="020B0503020204020204" pitchFamily="34" charset="-122"/>
               </a:rPr>
-              <a:t>完成文本的分词处理并比较不同分词器的表现，实现词嵌入与位置编码的提取与可视化，构建</a:t>
+              <a:t>比较不同分词器的输出结果，分析其在切分特定领域词汇时的表现。实现词嵌入与位置编码的提取，利用</a:t>
+            </a:r>
+            <a:r>
+              <a:rPr lang="en-US" altLang="zh-CN" dirty="0" smtClean="0">
+                <a:latin typeface="微软雅黑" panose="020B0503020204020204" pitchFamily="34" charset="-122"/>
+                <a:ea typeface="微软雅黑" panose="020B0503020204020204" pitchFamily="34" charset="-122"/>
+                <a:cs typeface="微软雅黑" panose="020B0503020204020204" pitchFamily="34" charset="-122"/>
+              </a:rPr>
+              <a:t>PCA</a:t>
+            </a:r>
+            <a:r>
+              <a:rPr lang="zh-CN" altLang="en-US" dirty="0" smtClean="0">
+                <a:latin typeface="微软雅黑" panose="020B0503020204020204" pitchFamily="34" charset="-122"/>
+                <a:ea typeface="微软雅黑" panose="020B0503020204020204" pitchFamily="34" charset="-122"/>
+                <a:cs typeface="微软雅黑" panose="020B0503020204020204" pitchFamily="34" charset="-122"/>
+              </a:rPr>
+              <a:t>降维技术进行可视化分析。结合词嵌入与位置编码，构建</a:t>
             </a:r>
             <a:r>
               <a:rPr lang="en-US" altLang="zh-CN" dirty="0" smtClean="0">
@@ -22742,7 +22790,7 @@
                 <a:ea typeface="微软雅黑" panose="020B0503020204020204" pitchFamily="34" charset="-122"/>
                 <a:cs typeface="微软雅黑" panose="020B0503020204020204" pitchFamily="34" charset="-122"/>
               </a:rPr>
-              <a:t>模型最终输入表示。</a:t>
+              <a:t>模型的最终输入表示，并分析其对模型性能的影响。</a:t>
             </a:r>
             <a:endParaRPr lang="zh-CN" altLang="en-US" dirty="0" smtClean="0">
               <a:latin typeface="微软雅黑" panose="020B0503020204020204" pitchFamily="34" charset="-122"/>
@@ -23055,7 +23103,7 @@
                 <a:cs typeface="微软雅黑" panose="020B0503020204020204" pitchFamily="34" charset="-122"/>
                 <a:sym typeface="+mn-ea"/>
               </a:rPr>
-              <a:t>配置</a:t>
+              <a:t>安装配置</a:t>
             </a:r>
             <a:r>
               <a:rPr lang="en-US" altLang="zh-CN" dirty="0">
@@ -23091,7 +23139,7 @@
                 <a:cs typeface="微软雅黑" panose="020B0503020204020204" pitchFamily="34" charset="-122"/>
                 <a:sym typeface="+mn-ea"/>
               </a:rPr>
-              <a:t>与</a:t>
+              <a:t>和</a:t>
             </a:r>
             <a:r>
               <a:rPr lang="en-US" altLang="zh-CN" dirty="0">
@@ -23109,7 +23157,7 @@
                 <a:cs typeface="微软雅黑" panose="020B0503020204020204" pitchFamily="34" charset="-122"/>
                 <a:sym typeface="+mn-ea"/>
               </a:rPr>
-              <a:t>等分词工具</a:t>
+              <a:t>分词工具</a:t>
             </a:r>
             <a:endParaRPr lang="zh-CN" altLang="en-US" dirty="0">
               <a:latin typeface="微软雅黑" panose="020B0503020204020204" pitchFamily="34" charset="-122"/>
@@ -23155,7 +23203,7 @@
                 <a:cs typeface="微软雅黑" panose="020B0503020204020204" pitchFamily="34" charset="-122"/>
                 <a:sym typeface="+mn-ea"/>
               </a:rPr>
-              <a:t>比较不同分词器的输出结果，分析其在切分特定领域词汇时的表现</a:t>
+              <a:t>完成文本的分词处理</a:t>
             </a:r>
             <a:endParaRPr lang="zh-CN" dirty="0">
               <a:latin typeface="微软雅黑" panose="020B0503020204020204" pitchFamily="34" charset="-122"/>
@@ -23175,6 +23223,52 @@
         <p:spPr>
           <a:xfrm>
             <a:off x="3006000" y="4503600"/>
+            <a:ext cx="8279765" cy="468630"/>
+          </a:xfrm>
+          <a:prstGeom prst="rect">
+            <a:avLst/>
+          </a:prstGeom>
+          <a:noFill/>
+        </p:spPr>
+        <p:txBody>
+          <a:bodyPr wrap="square" rtlCol="0">
+            <a:noAutofit/>
+          </a:bodyPr>
+          <a:p>
+            <a:pPr marL="800100" lvl="1" indent="-342900" algn="l" fontAlgn="auto">
+              <a:lnSpc>
+                <a:spcPct val="150000"/>
+              </a:lnSpc>
+              <a:buFont typeface="Wingdings" panose="05000000000000000000" pitchFamily="2" charset="2"/>
+              <a:buChar char="l"/>
+            </a:pPr>
+            <a:r>
+              <a:rPr lang="zh-CN" dirty="0">
+                <a:latin typeface="微软雅黑" panose="020B0503020204020204" pitchFamily="34" charset="-122"/>
+                <a:ea typeface="微软雅黑" panose="020B0503020204020204" pitchFamily="34" charset="-122"/>
+                <a:cs typeface="微软雅黑" panose="020B0503020204020204" pitchFamily="34" charset="-122"/>
+                <a:sym typeface="+mn-ea"/>
+              </a:rPr>
+              <a:t>比较不同分词器的输出结果，分析其在切分特定领域词汇时的表现</a:t>
+            </a:r>
+            <a:endParaRPr lang="zh-CN" dirty="0">
+              <a:latin typeface="微软雅黑" panose="020B0503020204020204" pitchFamily="34" charset="-122"/>
+              <a:ea typeface="微软雅黑" panose="020B0503020204020204" pitchFamily="34" charset="-122"/>
+              <a:cs typeface="微软雅黑" panose="020B0503020204020204" pitchFamily="34" charset="-122"/>
+              <a:sym typeface="+mn-ea"/>
+            </a:endParaRPr>
+          </a:p>
+        </p:txBody>
+      </p:sp>
+      <p:sp>
+        <p:nvSpPr>
+          <p:cNvPr id="16" name="文本框 15"/>
+          <p:cNvSpPr txBox="1"/>
+          <p:nvPr/>
+        </p:nvSpPr>
+        <p:spPr>
+          <a:xfrm>
+            <a:off x="3006090" y="4971600"/>
             <a:ext cx="8279765" cy="468630"/>
           </a:xfrm>
           <a:prstGeom prst="rect">
@@ -23232,70 +23326,6 @@
       </p:sp>
       <p:sp>
         <p:nvSpPr>
-          <p:cNvPr id="16" name="文本框 15"/>
-          <p:cNvSpPr txBox="1"/>
-          <p:nvPr/>
-        </p:nvSpPr>
-        <p:spPr>
-          <a:xfrm>
-            <a:off x="3006090" y="4971600"/>
-            <a:ext cx="8279765" cy="468630"/>
-          </a:xfrm>
-          <a:prstGeom prst="rect">
-            <a:avLst/>
-          </a:prstGeom>
-          <a:noFill/>
-        </p:spPr>
-        <p:txBody>
-          <a:bodyPr wrap="square" rtlCol="0">
-            <a:noAutofit/>
-          </a:bodyPr>
-          <a:p>
-            <a:pPr marL="800100" lvl="1" indent="-342900" algn="l" fontAlgn="auto">
-              <a:lnSpc>
-                <a:spcPct val="150000"/>
-              </a:lnSpc>
-              <a:buFont typeface="Wingdings" panose="05000000000000000000" pitchFamily="2" charset="2"/>
-              <a:buChar char="l"/>
-            </a:pPr>
-            <a:r>
-              <a:rPr lang="zh-CN" dirty="0">
-                <a:latin typeface="微软雅黑" panose="020B0503020204020204" pitchFamily="34" charset="-122"/>
-                <a:ea typeface="微软雅黑" panose="020B0503020204020204" pitchFamily="34" charset="-122"/>
-                <a:cs typeface="微软雅黑" panose="020B0503020204020204" pitchFamily="34" charset="-122"/>
-                <a:sym typeface="+mn-ea"/>
-              </a:rPr>
-              <a:t>融合词嵌入与位置编码构建</a:t>
-            </a:r>
-            <a:r>
-              <a:rPr lang="en-US" altLang="zh-CN" dirty="0">
-                <a:latin typeface="微软雅黑" panose="020B0503020204020204" pitchFamily="34" charset="-122"/>
-                <a:ea typeface="微软雅黑" panose="020B0503020204020204" pitchFamily="34" charset="-122"/>
-                <a:cs typeface="微软雅黑" panose="020B0503020204020204" pitchFamily="34" charset="-122"/>
-                <a:sym typeface="+mn-ea"/>
-              </a:rPr>
-              <a:t>Transformer</a:t>
-            </a:r>
-            <a:r>
-              <a:rPr lang="zh-CN" altLang="en-US" dirty="0">
-                <a:latin typeface="微软雅黑" panose="020B0503020204020204" pitchFamily="34" charset="-122"/>
-                <a:ea typeface="微软雅黑" panose="020B0503020204020204" pitchFamily="34" charset="-122"/>
-                <a:cs typeface="微软雅黑" panose="020B0503020204020204" pitchFamily="34" charset="-122"/>
-                <a:sym typeface="+mn-ea"/>
-              </a:rPr>
-              <a:t>输入</a:t>
-            </a:r>
-            <a:endParaRPr lang="zh-CN" altLang="en-US" dirty="0">
-              <a:latin typeface="微软雅黑" panose="020B0503020204020204" pitchFamily="34" charset="-122"/>
-              <a:ea typeface="微软雅黑" panose="020B0503020204020204" pitchFamily="34" charset="-122"/>
-              <a:cs typeface="微软雅黑" panose="020B0503020204020204" pitchFamily="34" charset="-122"/>
-              <a:sym typeface="+mn-ea"/>
-            </a:endParaRPr>
-          </a:p>
-        </p:txBody>
-      </p:sp>
-      <p:sp>
-        <p:nvSpPr>
           <p:cNvPr id="17" name="文本框 16"/>
           <p:cNvSpPr txBox="1"/>
           <p:nvPr/>
@@ -23329,9 +23359,27 @@
                 <a:cs typeface="微软雅黑" panose="020B0503020204020204" pitchFamily="34" charset="-122"/>
                 <a:sym typeface="+mn-ea"/>
               </a:rPr>
-              <a:t>理解分词的基本原理及其在自然语言处理中的重要性</a:t>
+              <a:t>结合词嵌入与位置编码构建</a:t>
             </a:r>
-            <a:endParaRPr lang="zh-CN" dirty="0">
+            <a:r>
+              <a:rPr lang="en-US" altLang="zh-CN" dirty="0">
+                <a:latin typeface="微软雅黑" panose="020B0503020204020204" pitchFamily="34" charset="-122"/>
+                <a:ea typeface="微软雅黑" panose="020B0503020204020204" pitchFamily="34" charset="-122"/>
+                <a:cs typeface="微软雅黑" panose="020B0503020204020204" pitchFamily="34" charset="-122"/>
+                <a:sym typeface="+mn-ea"/>
+              </a:rPr>
+              <a:t>Transformer</a:t>
+            </a:r>
+            <a:r>
+              <a:rPr lang="zh-CN" altLang="en-US" dirty="0">
+                <a:latin typeface="微软雅黑" panose="020B0503020204020204" pitchFamily="34" charset="-122"/>
+                <a:ea typeface="微软雅黑" panose="020B0503020204020204" pitchFamily="34" charset="-122"/>
+                <a:cs typeface="微软雅黑" panose="020B0503020204020204" pitchFamily="34" charset="-122"/>
+                <a:sym typeface="+mn-ea"/>
+              </a:rPr>
+              <a:t>输入</a:t>
+            </a:r>
+            <a:endParaRPr lang="zh-CN" altLang="en-US" dirty="0">
               <a:latin typeface="微软雅黑" panose="020B0503020204020204" pitchFamily="34" charset="-122"/>
               <a:ea typeface="微软雅黑" panose="020B0503020204020204" pitchFamily="34" charset="-122"/>
               <a:cs typeface="微软雅黑" panose="020B0503020204020204" pitchFamily="34" charset="-122"/>
@@ -26999,7 +27047,7 @@
                 <a:cs typeface="Times New Roman" panose="02020603050405020304" charset="0"/>
                 <a:sym typeface="+mn-ea"/>
               </a:rPr>
-              <a:t>使用不同的分词工具实现分词任务，并比较不同工具的优缺点</a:t>
+              <a:t>能够使用不同的分词工具实现分词任务，并比较不同工具的优缺点</a:t>
             </a:r>
             <a:endParaRPr lang="zh-CN" dirty="0" smtClean="0">
               <a:latin typeface="Arial" panose="020B0604020202020204" pitchFamily="34" charset="0"/>
@@ -27043,7 +27091,7 @@
                 <a:cs typeface="Times New Roman" panose="02020603050405020304" charset="0"/>
                 <a:sym typeface="+mn-ea"/>
               </a:rPr>
-              <a:t>理解分词的基本原理及其在自然语言处理中的重要性</a:t>
+              <a:t>能够理解分词的基本原理及其在自然语言处理中的重要性</a:t>
             </a:r>
             <a:endParaRPr lang="zh-CN" dirty="0" smtClean="0">
               <a:latin typeface="Arial" panose="020B0604020202020204" pitchFamily="34" charset="0"/>
@@ -27103,7 +27151,7 @@
                 <a:cs typeface="Arial" panose="020B0604020202020204" pitchFamily="34" charset="0"/>
                 <a:sym typeface="+mn-ea"/>
               </a:rPr>
-              <a:t>模型中词嵌入与位置编码的核心机制</a:t>
+              <a:t>词嵌入与位置编码核心机制</a:t>
             </a:r>
             <a:endParaRPr lang="zh-CN" altLang="en-US" dirty="0" smtClean="0">
               <a:latin typeface="Arial" panose="020B0604020202020204" pitchFamily="34" charset="0"/>
@@ -27147,7 +27195,7 @@
                 <a:cs typeface="Times New Roman" panose="02020603050405020304" charset="0"/>
                 <a:sym typeface="+mn-ea"/>
               </a:rPr>
-              <a:t>通过代码实践完成词嵌入向量与位置编码的可视化分析</a:t>
+              <a:t>能够通过代码实践完成词嵌入向量与位置编码的可视化分析</a:t>
             </a:r>
             <a:endParaRPr lang="zh-CN" dirty="0" smtClean="0">
               <a:latin typeface="Arial" panose="020B0604020202020204" pitchFamily="34" charset="0"/>
@@ -27191,7 +27239,7 @@
                 <a:cs typeface="Times New Roman" panose="02020603050405020304" charset="0"/>
                 <a:sym typeface="+mn-ea"/>
               </a:rPr>
-              <a:t>重点：分词技术原理与词嵌入位置编码机制</a:t>
+              <a:t>重点：掌握分词技术原理与词嵌入位置编码机制</a:t>
             </a:r>
             <a:endParaRPr lang="zh-CN" altLang="en-US" dirty="0" smtClean="0">
               <a:latin typeface="Arial" panose="020B0604020202020204" pitchFamily="34" charset="0"/>
